--- a/data-eng/decks/w1d5s3.pptx
+++ b/data-eng/decks/w1d5s3.pptx
@@ -8830,14 +8830,14 @@
         </p:nvSpPr>
         <p:spPr>
           <a:xfrm>
-            <a:off x="1143000" y="8058150"/>
-            <a:ext cx="16002000" cy="9525"/>
-          </a:xfrm>
-          <a:prstGeom prst="rect">
-            <a:avLst/>
-          </a:prstGeom>
-          <a:solidFill>
-            <a:srgbClr val="DCE1E8"/>
+            <a:off x="1143000" y="7581900"/>
+            <a:ext cx="38100" cy="323850"/>
+          </a:xfrm>
+          <a:prstGeom prst="rect">
+            <a:avLst/>
+          </a:prstGeom>
+          <a:solidFill>
+            <a:srgbClr val="BFD3F5"/>
           </a:solidFill>
           <a:ln>
             <a:noFill/>
@@ -8860,8 +8860,8 @@
         </p:nvSpPr>
         <p:spPr>
           <a:xfrm>
-            <a:off x="1143000" y="8248650"/>
-            <a:ext cx="13335000" cy="323850"/>
+            <a:off x="1314450" y="7581900"/>
+            <a:ext cx="15830550" cy="342900"/>
           </a:xfrm>
           <a:prstGeom prst="rect">
             <a:avLst/>
@@ -8880,6 +8880,77 @@
               </a:lnSpc>
             </a:pPr>
             <a:r>
+              <a:rPr sz="1725" b="1">
+                <a:solidFill>
+                  <a:srgbClr val="7D7D7D"/>
+                </a:solidFill>
+                <a:latin typeface="Pretendard"/>
+                <a:ea typeface="Pretendard"/>
+                <a:cs typeface="Pretendard"/>
+              </a:rPr>
+              <a:t>pgAdmin 에 등록한 서버도 사라진다 — admin 에는 볼륨이 없다. 로그인 뒤 호스트 db 로 다시 등록</a:t>
+            </a:r>
+          </a:p>
+        </p:txBody>
+      </p:sp>
+      <p:sp>
+        <p:nvSpPr>
+          <p:cNvPr id="28" name="Rectangle 27"/>
+          <p:cNvSpPr/>
+          <p:nvPr/>
+        </p:nvSpPr>
+        <p:spPr>
+          <a:xfrm>
+            <a:off x="1143000" y="8058150"/>
+            <a:ext cx="16002000" cy="9525"/>
+          </a:xfrm>
+          <a:prstGeom prst="rect">
+            <a:avLst/>
+          </a:prstGeom>
+          <a:solidFill>
+            <a:srgbClr val="DCE1E8"/>
+          </a:solidFill>
+          <a:ln>
+            <a:noFill/>
+          </a:ln>
+          <a:effectLst/>
+        </p:spPr>
+        <p:txBody>
+          <a:bodyPr rtlCol="0" anchor="ctr" wrap="square"/>
+          <a:lstStyle/>
+          <a:p>
+            <a:pPr algn="ctr"/>
+          </a:p>
+        </p:txBody>
+      </p:sp>
+      <p:sp>
+        <p:nvSpPr>
+          <p:cNvPr id="29" name="TextBox 28"/>
+          <p:cNvSpPr txBox="1"/>
+          <p:nvPr/>
+        </p:nvSpPr>
+        <p:spPr>
+          <a:xfrm>
+            <a:off x="1143000" y="8248650"/>
+            <a:ext cx="13335000" cy="323850"/>
+          </a:xfrm>
+          <a:prstGeom prst="rect">
+            <a:avLst/>
+          </a:prstGeom>
+          <a:noFill/>
+        </p:spPr>
+        <p:txBody>
+          <a:bodyPr wrap="square" lIns="0" rIns="0" tIns="0" bIns="0" anchor="t">
+            <a:spAutoFit/>
+          </a:bodyPr>
+          <a:lstStyle/>
+          <a:p>
+            <a:pPr algn="l">
+              <a:lnSpc>
+                <a:spcPct val="100000"/>
+              </a:lnSpc>
+            </a:pPr>
+            <a:r>
               <a:rPr sz="1725" b="0">
                 <a:solidFill>
                   <a:srgbClr val="7D7D7D"/>
@@ -8895,7 +8966,7 @@
       </p:sp>
       <p:sp>
         <p:nvSpPr>
-          <p:cNvPr id="28" name="TextBox 27"/>
+          <p:cNvPr id="30" name="TextBox 29"/>
           <p:cNvSpPr txBox="1"/>
           <p:nvPr/>
         </p:nvSpPr>

--- a/data-eng/decks/w1d5s3.pptx
+++ b/data-eng/decks/w1d5s3.pptx
@@ -3098,7 +3098,7 @@
       <p:grpSpPr/>
       <p:sp>
         <p:nvSpPr>
-          <p:cNvPr id="2" name="Oval 1"/>
+          <p:cNvPr id="2" name="deckgen:decor"/>
           <p:cNvSpPr/>
           <p:nvPr/>
         </p:nvSpPr>
@@ -3128,7 +3128,7 @@
       </p:sp>
       <p:sp>
         <p:nvSpPr>
-          <p:cNvPr id="3" name="Oval 2"/>
+          <p:cNvPr id="3" name="deckgen:decor"/>
           <p:cNvSpPr/>
           <p:nvPr/>
         </p:nvSpPr>
@@ -3158,7 +3158,7 @@
       </p:sp>
       <p:sp>
         <p:nvSpPr>
-          <p:cNvPr id="4" name="Oval 3"/>
+          <p:cNvPr id="4" name="deckgen:decor"/>
           <p:cNvSpPr/>
           <p:nvPr/>
         </p:nvSpPr>
@@ -3188,7 +3188,7 @@
       </p:sp>
       <p:sp>
         <p:nvSpPr>
-          <p:cNvPr id="5" name="Rectangle 4"/>
+          <p:cNvPr id="5" name="deckgen:decor"/>
           <p:cNvSpPr/>
           <p:nvPr/>
         </p:nvSpPr>
@@ -3218,7 +3218,7 @@
       </p:sp>
       <p:sp>
         <p:nvSpPr>
-          <p:cNvPr id="6" name="Oval 5"/>
+          <p:cNvPr id="6" name="deckgen:decor"/>
           <p:cNvSpPr/>
           <p:nvPr/>
         </p:nvSpPr>
@@ -3248,7 +3248,7 @@
       </p:sp>
       <p:sp>
         <p:nvSpPr>
-          <p:cNvPr id="7" name="Oval 6"/>
+          <p:cNvPr id="7" name="deckgen:decor"/>
           <p:cNvSpPr/>
           <p:nvPr/>
         </p:nvSpPr>
@@ -3278,7 +3278,7 @@
       </p:sp>
       <p:sp>
         <p:nvSpPr>
-          <p:cNvPr id="8" name="Oval 7"/>
+          <p:cNvPr id="8" name="deckgen:decor"/>
           <p:cNvSpPr/>
           <p:nvPr/>
         </p:nvSpPr>
@@ -3308,7 +3308,7 @@
       </p:sp>
       <p:sp>
         <p:nvSpPr>
-          <p:cNvPr id="9" name="Oval 8"/>
+          <p:cNvPr id="9" name="deckgen:decor"/>
           <p:cNvSpPr/>
           <p:nvPr/>
         </p:nvSpPr>
@@ -3338,7 +3338,7 @@
       </p:sp>
       <p:sp>
         <p:nvSpPr>
-          <p:cNvPr id="10" name="Rectangle 9"/>
+          <p:cNvPr id="10" name="deckgen:decor"/>
           <p:cNvSpPr/>
           <p:nvPr/>
         </p:nvSpPr>
@@ -3616,7 +3616,7 @@
       <p:grpSpPr/>
       <p:sp>
         <p:nvSpPr>
-          <p:cNvPr id="2" name="Oval 1"/>
+          <p:cNvPr id="2" name="deckgen:decor"/>
           <p:cNvSpPr/>
           <p:nvPr/>
         </p:nvSpPr>
@@ -3646,7 +3646,7 @@
       </p:sp>
       <p:sp>
         <p:nvSpPr>
-          <p:cNvPr id="3" name="Oval 2"/>
+          <p:cNvPr id="3" name="deckgen:decor"/>
           <p:cNvSpPr/>
           <p:nvPr/>
         </p:nvSpPr>
@@ -3676,7 +3676,7 @@
       </p:sp>
       <p:sp>
         <p:nvSpPr>
-          <p:cNvPr id="4" name="Oval 3"/>
+          <p:cNvPr id="4" name="deckgen:decor"/>
           <p:cNvSpPr/>
           <p:nvPr/>
         </p:nvSpPr>
@@ -4607,7 +4607,7 @@
       <p:grpSpPr/>
       <p:sp>
         <p:nvSpPr>
-          <p:cNvPr id="2" name="Oval 1"/>
+          <p:cNvPr id="2" name="deckgen:decor"/>
           <p:cNvSpPr/>
           <p:nvPr/>
         </p:nvSpPr>
@@ -4637,7 +4637,7 @@
       </p:sp>
       <p:sp>
         <p:nvSpPr>
-          <p:cNvPr id="3" name="Oval 2"/>
+          <p:cNvPr id="3" name="deckgen:decor"/>
           <p:cNvSpPr/>
           <p:nvPr/>
         </p:nvSpPr>
@@ -4667,7 +4667,7 @@
       </p:sp>
       <p:sp>
         <p:nvSpPr>
-          <p:cNvPr id="4" name="Oval 3"/>
+          <p:cNvPr id="4" name="deckgen:decor"/>
           <p:cNvSpPr/>
           <p:nvPr/>
         </p:nvSpPr>
@@ -4948,7 +4948,7 @@
                 <a:ea typeface="Pretendard"/>
                 <a:cs typeface="Pretendard"/>
               </a:rPr>
-              <a:t>1 데이터 보존 확인</a:t>
+              <a:t>1. 데이터 보존 확인</a:t>
             </a:r>
           </a:p>
         </p:txBody>
@@ -5094,7 +5094,7 @@
                 <a:ea typeface="Pretendard"/>
                 <a:cs typeface="Pretendard"/>
               </a:rPr>
-              <a:t>2 README 작성</a:t>
+              <a:t>2. README 작성</a:t>
             </a:r>
           </a:p>
         </p:txBody>
@@ -5240,7 +5240,7 @@
                 <a:ea typeface="Pretendard"/>
                 <a:cs typeface="Pretendard"/>
               </a:rPr>
-              <a:t>3 스스로 검증</a:t>
+              <a:t>3. 스스로 검증</a:t>
             </a:r>
           </a:p>
         </p:txBody>
@@ -5386,7 +5386,7 @@
                 <a:ea typeface="Pretendard"/>
                 <a:cs typeface="Pretendard"/>
               </a:rPr>
-              <a:t>4 제출</a:t>
+              <a:t>4. 제출</a:t>
             </a:r>
           </a:p>
         </p:txBody>
@@ -5564,7 +5564,7 @@
       <p:grpSpPr/>
       <p:sp>
         <p:nvSpPr>
-          <p:cNvPr id="2" name="Oval 1"/>
+          <p:cNvPr id="2" name="deckgen:decor"/>
           <p:cNvSpPr/>
           <p:nvPr/>
         </p:nvSpPr>
@@ -5594,7 +5594,7 @@
       </p:sp>
       <p:sp>
         <p:nvSpPr>
-          <p:cNvPr id="3" name="Oval 2"/>
+          <p:cNvPr id="3" name="deckgen:decor"/>
           <p:cNvSpPr/>
           <p:nvPr/>
         </p:nvSpPr>
@@ -5624,7 +5624,7 @@
       </p:sp>
       <p:sp>
         <p:nvSpPr>
-          <p:cNvPr id="4" name="Oval 3"/>
+          <p:cNvPr id="4" name="deckgen:decor"/>
           <p:cNvSpPr/>
           <p:nvPr/>
         </p:nvSpPr>
@@ -6662,7 +6662,7 @@
       <p:grpSpPr/>
       <p:sp>
         <p:nvSpPr>
-          <p:cNvPr id="2" name="Oval 1"/>
+          <p:cNvPr id="2" name="deckgen:decor"/>
           <p:cNvSpPr/>
           <p:nvPr/>
         </p:nvSpPr>
@@ -6692,7 +6692,7 @@
       </p:sp>
       <p:sp>
         <p:nvSpPr>
-          <p:cNvPr id="3" name="Oval 2"/>
+          <p:cNvPr id="3" name="deckgen:decor"/>
           <p:cNvSpPr/>
           <p:nvPr/>
         </p:nvSpPr>
@@ -6722,7 +6722,7 @@
       </p:sp>
       <p:sp>
         <p:nvSpPr>
-          <p:cNvPr id="4" name="Oval 3"/>
+          <p:cNvPr id="4" name="deckgen:decor"/>
           <p:cNvSpPr/>
           <p:nvPr/>
         </p:nvSpPr>
@@ -7927,7 +7927,7 @@
       <p:grpSpPr/>
       <p:sp>
         <p:nvSpPr>
-          <p:cNvPr id="2" name="Oval 1"/>
+          <p:cNvPr id="2" name="deckgen:decor"/>
           <p:cNvSpPr/>
           <p:nvPr/>
         </p:nvSpPr>
@@ -7957,7 +7957,7 @@
       </p:sp>
       <p:sp>
         <p:nvSpPr>
-          <p:cNvPr id="3" name="Oval 2"/>
+          <p:cNvPr id="3" name="deckgen:decor"/>
           <p:cNvSpPr/>
           <p:nvPr/>
         </p:nvSpPr>
@@ -7987,7 +7987,7 @@
       </p:sp>
       <p:sp>
         <p:nvSpPr>
-          <p:cNvPr id="4" name="Oval 3"/>
+          <p:cNvPr id="4" name="deckgen:decor"/>
           <p:cNvSpPr/>
           <p:nvPr/>
         </p:nvSpPr>
@@ -9025,7 +9025,7 @@
       <p:grpSpPr/>
       <p:sp>
         <p:nvSpPr>
-          <p:cNvPr id="2" name="Oval 1"/>
+          <p:cNvPr id="2" name="deckgen:decor"/>
           <p:cNvSpPr/>
           <p:nvPr/>
         </p:nvSpPr>
@@ -9055,7 +9055,7 @@
       </p:sp>
       <p:sp>
         <p:nvSpPr>
-          <p:cNvPr id="3" name="Oval 2"/>
+          <p:cNvPr id="3" name="deckgen:decor"/>
           <p:cNvSpPr/>
           <p:nvPr/>
         </p:nvSpPr>
@@ -9085,7 +9085,7 @@
       </p:sp>
       <p:sp>
         <p:nvSpPr>
-          <p:cNvPr id="4" name="Oval 3"/>
+          <p:cNvPr id="4" name="deckgen:decor"/>
           <p:cNvSpPr/>
           <p:nvPr/>
         </p:nvSpPr>
@@ -10145,7 +10145,7 @@
       <p:grpSpPr/>
       <p:sp>
         <p:nvSpPr>
-          <p:cNvPr id="2" name="Oval 1"/>
+          <p:cNvPr id="2" name="deckgen:decor"/>
           <p:cNvSpPr/>
           <p:nvPr/>
         </p:nvSpPr>
@@ -10175,7 +10175,7 @@
       </p:sp>
       <p:sp>
         <p:nvSpPr>
-          <p:cNvPr id="3" name="Oval 2"/>
+          <p:cNvPr id="3" name="deckgen:decor"/>
           <p:cNvSpPr/>
           <p:nvPr/>
         </p:nvSpPr>
@@ -10205,7 +10205,7 @@
       </p:sp>
       <p:sp>
         <p:nvSpPr>
-          <p:cNvPr id="4" name="Oval 3"/>
+          <p:cNvPr id="4" name="deckgen:decor"/>
           <p:cNvSpPr/>
           <p:nvPr/>
         </p:nvSpPr>
@@ -11061,7 +11061,7 @@
       <p:grpSpPr/>
       <p:sp>
         <p:nvSpPr>
-          <p:cNvPr id="2" name="Oval 1"/>
+          <p:cNvPr id="2" name="deckgen:decor"/>
           <p:cNvSpPr/>
           <p:nvPr/>
         </p:nvSpPr>
@@ -11091,7 +11091,7 @@
       </p:sp>
       <p:sp>
         <p:nvSpPr>
-          <p:cNvPr id="3" name="Oval 2"/>
+          <p:cNvPr id="3" name="deckgen:decor"/>
           <p:cNvSpPr/>
           <p:nvPr/>
         </p:nvSpPr>

--- a/data-eng/decks/w1d5s3.pptx
+++ b/data-eng/decks/w1d5s3.pptx
@@ -11731,7 +11731,7 @@
                 <a:ea typeface="Pretendard"/>
                 <a:cs typeface="Pretendard"/>
               </a:rPr>
-              <a:t>2주차 예고 — MySQL 8.0 설치 및 기초 쿼리</a:t>
+              <a:t>2주차 예고 — MySQL 9.7 설치 및 기초 쿼리</a:t>
             </a:r>
           </a:p>
         </p:txBody>
